--- a/Battery Charger Project/Docs/Off-Grid Battery Charger.pptx
+++ b/Battery Charger Project/Docs/Off-Grid Battery Charger.pptx
@@ -5,27 +5,28 @@
     <p:sldMasterId id="2147483747" r:id="rId4"/>
   </p:sldMasterIdLst>
   <p:notesMasterIdLst>
-    <p:notesMasterId r:id="rId23"/>
+    <p:notesMasterId r:id="rId24"/>
   </p:notesMasterIdLst>
   <p:sldIdLst>
     <p:sldId id="256" r:id="rId5"/>
     <p:sldId id="258" r:id="rId6"/>
     <p:sldId id="257" r:id="rId7"/>
     <p:sldId id="266" r:id="rId8"/>
-    <p:sldId id="259" r:id="rId9"/>
-    <p:sldId id="260" r:id="rId10"/>
-    <p:sldId id="265" r:id="rId11"/>
-    <p:sldId id="262" r:id="rId12"/>
-    <p:sldId id="263" r:id="rId13"/>
-    <p:sldId id="264" r:id="rId14"/>
-    <p:sldId id="267" r:id="rId15"/>
-    <p:sldId id="268" r:id="rId16"/>
-    <p:sldId id="269" r:id="rId17"/>
-    <p:sldId id="270" r:id="rId18"/>
-    <p:sldId id="271" r:id="rId19"/>
-    <p:sldId id="272" r:id="rId20"/>
-    <p:sldId id="273" r:id="rId21"/>
-    <p:sldId id="274" r:id="rId22"/>
+    <p:sldId id="275" r:id="rId9"/>
+    <p:sldId id="259" r:id="rId10"/>
+    <p:sldId id="260" r:id="rId11"/>
+    <p:sldId id="265" r:id="rId12"/>
+    <p:sldId id="262" r:id="rId13"/>
+    <p:sldId id="263" r:id="rId14"/>
+    <p:sldId id="264" r:id="rId15"/>
+    <p:sldId id="267" r:id="rId16"/>
+    <p:sldId id="268" r:id="rId17"/>
+    <p:sldId id="269" r:id="rId18"/>
+    <p:sldId id="270" r:id="rId19"/>
+    <p:sldId id="271" r:id="rId20"/>
+    <p:sldId id="272" r:id="rId21"/>
+    <p:sldId id="273" r:id="rId22"/>
+    <p:sldId id="274" r:id="rId23"/>
   </p:sldIdLst>
   <p:sldSz cx="12192000" cy="6858000"/>
   <p:notesSz cx="6858000" cy="9144000"/>
@@ -214,7 +215,7 @@
           <a:p>
             <a:fld id="{6A9953B1-FB58-41CD-8907-8A60C130A491}" type="datetimeFigureOut">
               <a:rPr lang="en-US" smtClean="0"/>
-              <a:t>9/29/2026</a:t>
+              <a:t>10/13/2026</a:t>
             </a:fld>
             <a:endParaRPr lang="en-US"/>
           </a:p>
@@ -546,7 +547,7 @@
           <a:p>
             <a:fld id="{72C3E25D-D4AD-4826-BE5C-FFD003263AFB}" type="slidenum">
               <a:rPr lang="en-US" smtClean="0"/>
-              <a:t>7</a:t>
+              <a:t>8</a:t>
             </a:fld>
             <a:endParaRPr lang="en-US"/>
           </a:p>
@@ -696,7 +697,7 @@
           <a:p>
             <a:fld id="{728CC57E-8C99-40F8-9D1C-88C77727B4A1}" type="datetimeFigureOut">
               <a:rPr lang="en-US" smtClean="0"/>
-              <a:t>9/29/2026</a:t>
+              <a:t>10/13/2026</a:t>
             </a:fld>
             <a:endParaRPr lang="en-US"/>
           </a:p>
@@ -866,7 +867,7 @@
           <a:p>
             <a:fld id="{728CC57E-8C99-40F8-9D1C-88C77727B4A1}" type="datetimeFigureOut">
               <a:rPr lang="en-US" smtClean="0"/>
-              <a:t>9/29/2026</a:t>
+              <a:t>10/13/2026</a:t>
             </a:fld>
             <a:endParaRPr lang="en-US"/>
           </a:p>
@@ -1046,7 +1047,7 @@
           <a:p>
             <a:fld id="{728CC57E-8C99-40F8-9D1C-88C77727B4A1}" type="datetimeFigureOut">
               <a:rPr lang="en-US" smtClean="0"/>
-              <a:t>9/29/2026</a:t>
+              <a:t>10/13/2026</a:t>
             </a:fld>
             <a:endParaRPr lang="en-US"/>
           </a:p>
@@ -1216,7 +1217,7 @@
           <a:p>
             <a:fld id="{728CC57E-8C99-40F8-9D1C-88C77727B4A1}" type="datetimeFigureOut">
               <a:rPr lang="en-US" smtClean="0"/>
-              <a:t>9/29/2026</a:t>
+              <a:t>10/13/2026</a:t>
             </a:fld>
             <a:endParaRPr lang="en-US"/>
           </a:p>
@@ -1462,7 +1463,7 @@
           <a:p>
             <a:fld id="{728CC57E-8C99-40F8-9D1C-88C77727B4A1}" type="datetimeFigureOut">
               <a:rPr lang="en-US" smtClean="0"/>
-              <a:t>9/29/2026</a:t>
+              <a:t>10/13/2026</a:t>
             </a:fld>
             <a:endParaRPr lang="en-US"/>
           </a:p>
@@ -1694,7 +1695,7 @@
           <a:p>
             <a:fld id="{728CC57E-8C99-40F8-9D1C-88C77727B4A1}" type="datetimeFigureOut">
               <a:rPr lang="en-US" smtClean="0"/>
-              <a:t>9/29/2026</a:t>
+              <a:t>10/13/2026</a:t>
             </a:fld>
             <a:endParaRPr lang="en-US"/>
           </a:p>
@@ -2061,7 +2062,7 @@
           <a:p>
             <a:fld id="{728CC57E-8C99-40F8-9D1C-88C77727B4A1}" type="datetimeFigureOut">
               <a:rPr lang="en-US" smtClean="0"/>
-              <a:t>9/29/2026</a:t>
+              <a:t>10/13/2026</a:t>
             </a:fld>
             <a:endParaRPr lang="en-US"/>
           </a:p>
@@ -2179,7 +2180,7 @@
           <a:p>
             <a:fld id="{728CC57E-8C99-40F8-9D1C-88C77727B4A1}" type="datetimeFigureOut">
               <a:rPr lang="en-US" smtClean="0"/>
-              <a:t>9/29/2026</a:t>
+              <a:t>10/13/2026</a:t>
             </a:fld>
             <a:endParaRPr lang="en-US"/>
           </a:p>
@@ -2274,7 +2275,7 @@
           <a:p>
             <a:fld id="{728CC57E-8C99-40F8-9D1C-88C77727B4A1}" type="datetimeFigureOut">
               <a:rPr lang="en-US" smtClean="0"/>
-              <a:t>9/29/2026</a:t>
+              <a:t>10/13/2026</a:t>
             </a:fld>
             <a:endParaRPr lang="en-US"/>
           </a:p>
@@ -2551,7 +2552,7 @@
           <a:p>
             <a:fld id="{728CC57E-8C99-40F8-9D1C-88C77727B4A1}" type="datetimeFigureOut">
               <a:rPr lang="en-US" smtClean="0"/>
-              <a:t>9/29/2026</a:t>
+              <a:t>10/13/2026</a:t>
             </a:fld>
             <a:endParaRPr lang="en-US"/>
           </a:p>
@@ -2808,7 +2809,7 @@
           <a:p>
             <a:fld id="{728CC57E-8C99-40F8-9D1C-88C77727B4A1}" type="datetimeFigureOut">
               <a:rPr lang="en-US" smtClean="0"/>
-              <a:t>9/29/2026</a:t>
+              <a:t>10/13/2026</a:t>
             </a:fld>
             <a:endParaRPr lang="en-US"/>
           </a:p>
@@ -3021,7 +3022,7 @@
           <a:p>
             <a:fld id="{728CC57E-8C99-40F8-9D1C-88C77727B4A1}" type="datetimeFigureOut">
               <a:rPr lang="en-US" smtClean="0"/>
-              <a:t>9/29/2026</a:t>
+              <a:t>10/13/2026</a:t>
             </a:fld>
             <a:endParaRPr lang="en-US"/>
           </a:p>
@@ -3485,6 +3486,15 @@
               <a:t>Zano Sgroi</a:t>
             </a:r>
           </a:p>
+          <a:p>
+            <a:r>
+              <a:rPr lang="en-US" dirty="0"/>
+              <a:t>*Currently in development: May 2026 - Present</a:t>
+            </a:r>
+          </a:p>
+          <a:p>
+            <a:endParaRPr lang="en-US" dirty="0"/>
+          </a:p>
         </p:txBody>
       </p:sp>
     </p:spTree>
@@ -3522,6 +3532,96 @@
           <p:cNvPr id="2" name="Title 1">
             <a:extLst>
               <a:ext uri="{FF2B5EF4-FFF2-40B4-BE49-F238E27FC236}">
+                <a16:creationId xmlns:a16="http://schemas.microsoft.com/office/drawing/2014/main" id="{585FF3C3-3119-816C-8D49-AF0BB9052B8B}"/>
+              </a:ext>
+            </a:extLst>
+          </p:cNvPr>
+          <p:cNvSpPr>
+            <a:spLocks noGrp="1"/>
+          </p:cNvSpPr>
+          <p:nvPr>
+            <p:ph type="title"/>
+          </p:nvPr>
+        </p:nvSpPr>
+        <p:spPr/>
+        <p:txBody>
+          <a:bodyPr/>
+          <a:lstStyle/>
+          <a:p>
+            <a:r>
+              <a:rPr lang="en-US" dirty="0"/>
+              <a:t>Battery Voltage (Vm2)</a:t>
+            </a:r>
+          </a:p>
+        </p:txBody>
+      </p:sp>
+      <p:pic>
+        <p:nvPicPr>
+          <p:cNvPr id="12" name="Content Placeholder 11">
+            <a:extLst>
+              <a:ext uri="{FF2B5EF4-FFF2-40B4-BE49-F238E27FC236}">
+                <a16:creationId xmlns:a16="http://schemas.microsoft.com/office/drawing/2014/main" id="{1CCC0623-98C2-6C3E-CFA3-E122F1F3B714}"/>
+              </a:ext>
+            </a:extLst>
+          </p:cNvPr>
+          <p:cNvPicPr>
+            <a:picLocks noGrp="1" noChangeAspect="1"/>
+          </p:cNvPicPr>
+          <p:nvPr>
+            <p:ph idx="1"/>
+          </p:nvPr>
+        </p:nvPicPr>
+        <p:blipFill>
+          <a:blip r:embed="rId2"/>
+          <a:stretch>
+            <a:fillRect/>
+          </a:stretch>
+        </p:blipFill>
+        <p:spPr>
+          <a:xfrm>
+            <a:off x="2661992" y="1690688"/>
+            <a:ext cx="6868015" cy="5108568"/>
+          </a:xfrm>
+          <a:prstGeom prst="rect">
+            <a:avLst/>
+          </a:prstGeom>
+        </p:spPr>
+      </p:pic>
+    </p:spTree>
+    <p:extLst>
+      <p:ext uri="{BB962C8B-B14F-4D97-AF65-F5344CB8AC3E}">
+        <p14:creationId xmlns:p14="http://schemas.microsoft.com/office/powerpoint/2010/main" val="279167961"/>
+      </p:ext>
+    </p:extLst>
+  </p:cSld>
+  <p:clrMapOvr>
+    <a:masterClrMapping/>
+  </p:clrMapOvr>
+</p:sld>
+</file>
+
+<file path=ppt/slides/slide11.xml><?xml version="1.0" encoding="utf-8"?>
+<p:sld xmlns:a="http://schemas.openxmlformats.org/drawingml/2006/main" xmlns:r="http://schemas.openxmlformats.org/officeDocument/2006/relationships" xmlns:p="http://schemas.openxmlformats.org/presentationml/2006/main">
+  <p:cSld>
+    <p:spTree>
+      <p:nvGrpSpPr>
+        <p:cNvPr id="1" name=""/>
+        <p:cNvGrpSpPr/>
+        <p:nvPr/>
+      </p:nvGrpSpPr>
+      <p:grpSpPr>
+        <a:xfrm>
+          <a:off x="0" y="0"/>
+          <a:ext cx="0" cy="0"/>
+          <a:chOff x="0" y="0"/>
+          <a:chExt cx="0" cy="0"/>
+        </a:xfrm>
+      </p:grpSpPr>
+      <p:sp>
+        <p:nvSpPr>
+          <p:cNvPr id="2" name="Title 1">
+            <a:extLst>
+              <a:ext uri="{FF2B5EF4-FFF2-40B4-BE49-F238E27FC236}">
                 <a16:creationId xmlns:a16="http://schemas.microsoft.com/office/drawing/2014/main" id="{EF0C9E0D-06A7-1C16-0F5D-C2A89A707C73}"/>
               </a:ext>
             </a:extLst>
@@ -3590,7 +3690,7 @@
 </p:sld>
 </file>
 
-<file path=ppt/slides/slide11.xml><?xml version="1.0" encoding="utf-8"?>
+<file path=ppt/slides/slide12.xml><?xml version="1.0" encoding="utf-8"?>
 <p:sld xmlns:a="http://schemas.openxmlformats.org/drawingml/2006/main" xmlns:r="http://schemas.openxmlformats.org/officeDocument/2006/relationships" xmlns:p="http://schemas.openxmlformats.org/presentationml/2006/main">
   <p:cSld>
     <p:bg>
@@ -3726,7 +3826,7 @@
 </p:sld>
 </file>
 
-<file path=ppt/slides/slide12.xml><?xml version="1.0" encoding="utf-8"?>
+<file path=ppt/slides/slide13.xml><?xml version="1.0" encoding="utf-8"?>
 <p:sld xmlns:a="http://schemas.openxmlformats.org/drawingml/2006/main" xmlns:r="http://schemas.openxmlformats.org/officeDocument/2006/relationships" xmlns:p="http://schemas.openxmlformats.org/presentationml/2006/main">
   <p:cSld>
     <p:spTree>
@@ -3816,7 +3916,7 @@
 </p:sld>
 </file>
 
-<file path=ppt/slides/slide13.xml><?xml version="1.0" encoding="utf-8"?>
+<file path=ppt/slides/slide14.xml><?xml version="1.0" encoding="utf-8"?>
 <p:sld xmlns:a="http://schemas.openxmlformats.org/drawingml/2006/main" xmlns:r="http://schemas.openxmlformats.org/officeDocument/2006/relationships" xmlns:p="http://schemas.openxmlformats.org/presentationml/2006/main">
   <p:cSld>
     <p:spTree>
@@ -3906,7 +4006,7 @@
 </p:sld>
 </file>
 
-<file path=ppt/slides/slide14.xml><?xml version="1.0" encoding="utf-8"?>
+<file path=ppt/slides/slide15.xml><?xml version="1.0" encoding="utf-8"?>
 <p:sld xmlns:a="http://schemas.openxmlformats.org/drawingml/2006/main" xmlns:r="http://schemas.openxmlformats.org/officeDocument/2006/relationships" xmlns:p="http://schemas.openxmlformats.org/presentationml/2006/main">
   <p:cSld>
     <p:spTree>
@@ -3996,7 +4096,7 @@
 </p:sld>
 </file>
 
-<file path=ppt/slides/slide15.xml><?xml version="1.0" encoding="utf-8"?>
+<file path=ppt/slides/slide16.xml><?xml version="1.0" encoding="utf-8"?>
 <p:sld xmlns:a="http://schemas.openxmlformats.org/drawingml/2006/main" xmlns:r="http://schemas.openxmlformats.org/officeDocument/2006/relationships" xmlns:p="http://schemas.openxmlformats.org/presentationml/2006/main">
   <p:cSld>
     <p:spTree>
@@ -4100,7 +4200,7 @@
 </p:sld>
 </file>
 
-<file path=ppt/slides/slide16.xml><?xml version="1.0" encoding="utf-8"?>
+<file path=ppt/slides/slide17.xml><?xml version="1.0" encoding="utf-8"?>
 <p:sld xmlns:a="http://schemas.openxmlformats.org/drawingml/2006/main" xmlns:r="http://schemas.openxmlformats.org/officeDocument/2006/relationships" xmlns:p="http://schemas.openxmlformats.org/presentationml/2006/main">
   <p:cSld>
     <p:spTree>
@@ -4190,7 +4290,7 @@
 </p:sld>
 </file>
 
-<file path=ppt/slides/slide17.xml><?xml version="1.0" encoding="utf-8"?>
+<file path=ppt/slides/slide18.xml><?xml version="1.0" encoding="utf-8"?>
 <p:sld xmlns:a="http://schemas.openxmlformats.org/drawingml/2006/main" xmlns:r="http://schemas.openxmlformats.org/officeDocument/2006/relationships" xmlns:p="http://schemas.openxmlformats.org/presentationml/2006/main">
   <p:cSld>
     <p:spTree>
@@ -4280,7 +4380,7 @@
 </p:sld>
 </file>
 
-<file path=ppt/slides/slide18.xml><?xml version="1.0" encoding="utf-8"?>
+<file path=ppt/slides/slide19.xml><?xml version="1.0" encoding="utf-8"?>
 <p:sld xmlns:a="http://schemas.openxmlformats.org/drawingml/2006/main" xmlns:r="http://schemas.openxmlformats.org/officeDocument/2006/relationships" xmlns:p="http://schemas.openxmlformats.org/presentationml/2006/main">
   <p:cSld>
     <p:spTree>
@@ -4619,10 +4719,10 @@
       </p:sp>
       <p:pic>
         <p:nvPicPr>
-          <p:cNvPr id="7" name="Content Placeholder 6">
+          <p:cNvPr id="6" name="Content Placeholder 5">
             <a:extLst>
               <a:ext uri="{FF2B5EF4-FFF2-40B4-BE49-F238E27FC236}">
-                <a16:creationId xmlns:a16="http://schemas.microsoft.com/office/drawing/2014/main" id="{0C9ABB6C-253D-E759-254D-7B36D2CFE76E}"/>
+                <a16:creationId xmlns:a16="http://schemas.microsoft.com/office/drawing/2014/main" id="{9F157CD7-1D21-93C7-151C-9F9A7C47F319}"/>
               </a:ext>
             </a:extLst>
           </p:cNvPr>
@@ -4641,8 +4741,8 @@
         </p:blipFill>
         <p:spPr>
           <a:xfrm>
-            <a:off x="838200" y="1690688"/>
-            <a:ext cx="10515599" cy="4421239"/>
+            <a:off x="838200" y="1866903"/>
+            <a:ext cx="10515600" cy="4268781"/>
           </a:xfrm>
           <a:prstGeom prst="rect">
             <a:avLst/>
@@ -4684,6 +4784,96 @@
           <p:cNvPr id="2" name="Title 1">
             <a:extLst>
               <a:ext uri="{FF2B5EF4-FFF2-40B4-BE49-F238E27FC236}">
+                <a16:creationId xmlns:a16="http://schemas.microsoft.com/office/drawing/2014/main" id="{E2B33C81-6C78-9B03-F2B9-F6D1036E590A}"/>
+              </a:ext>
+            </a:extLst>
+          </p:cNvPr>
+          <p:cNvSpPr>
+            <a:spLocks noGrp="1"/>
+          </p:cNvSpPr>
+          <p:nvPr>
+            <p:ph type="title"/>
+          </p:nvPr>
+        </p:nvSpPr>
+        <p:spPr/>
+        <p:txBody>
+          <a:bodyPr/>
+          <a:lstStyle/>
+          <a:p>
+            <a:r>
+              <a:rPr lang="en-US" dirty="0"/>
+              <a:t>PCB layout</a:t>
+            </a:r>
+          </a:p>
+        </p:txBody>
+      </p:sp>
+      <p:pic>
+        <p:nvPicPr>
+          <p:cNvPr id="5" name="Content Placeholder 4">
+            <a:extLst>
+              <a:ext uri="{FF2B5EF4-FFF2-40B4-BE49-F238E27FC236}">
+                <a16:creationId xmlns:a16="http://schemas.microsoft.com/office/drawing/2014/main" id="{7893895D-C130-C0F6-DB65-855537F99600}"/>
+              </a:ext>
+            </a:extLst>
+          </p:cNvPr>
+          <p:cNvPicPr>
+            <a:picLocks noGrp="1" noChangeAspect="1"/>
+          </p:cNvPicPr>
+          <p:nvPr>
+            <p:ph idx="1"/>
+          </p:nvPr>
+        </p:nvPicPr>
+        <p:blipFill>
+          <a:blip r:embed="rId2"/>
+          <a:stretch>
+            <a:fillRect/>
+          </a:stretch>
+        </p:blipFill>
+        <p:spPr>
+          <a:xfrm>
+            <a:off x="4299285" y="219869"/>
+            <a:ext cx="7411452" cy="6418262"/>
+          </a:xfrm>
+          <a:prstGeom prst="rect">
+            <a:avLst/>
+          </a:prstGeom>
+        </p:spPr>
+      </p:pic>
+    </p:spTree>
+    <p:extLst>
+      <p:ext uri="{BB962C8B-B14F-4D97-AF65-F5344CB8AC3E}">
+        <p14:creationId xmlns:p14="http://schemas.microsoft.com/office/powerpoint/2010/main" val="810401360"/>
+      </p:ext>
+    </p:extLst>
+  </p:cSld>
+  <p:clrMapOvr>
+    <a:masterClrMapping/>
+  </p:clrMapOvr>
+</p:sld>
+</file>
+
+<file path=ppt/slides/slide6.xml><?xml version="1.0" encoding="utf-8"?>
+<p:sld xmlns:a="http://schemas.openxmlformats.org/drawingml/2006/main" xmlns:r="http://schemas.openxmlformats.org/officeDocument/2006/relationships" xmlns:p="http://schemas.openxmlformats.org/presentationml/2006/main">
+  <p:cSld>
+    <p:spTree>
+      <p:nvGrpSpPr>
+        <p:cNvPr id="1" name=""/>
+        <p:cNvGrpSpPr/>
+        <p:nvPr/>
+      </p:nvGrpSpPr>
+      <p:grpSpPr>
+        <a:xfrm>
+          <a:off x="0" y="0"/>
+          <a:ext cx="0" cy="0"/>
+          <a:chOff x="0" y="0"/>
+          <a:chExt cx="0" cy="0"/>
+        </a:xfrm>
+      </p:grpSpPr>
+      <p:sp>
+        <p:nvSpPr>
+          <p:cNvPr id="2" name="Title 1">
+            <a:extLst>
+              <a:ext uri="{FF2B5EF4-FFF2-40B4-BE49-F238E27FC236}">
                 <a16:creationId xmlns:a16="http://schemas.microsoft.com/office/drawing/2014/main" id="{AB9D69EB-C903-4A0E-4BA3-2BEA8DB0DE81}"/>
               </a:ext>
             </a:extLst>
@@ -4758,7 +4948,7 @@
 </p:sld>
 </file>
 
-<file path=ppt/slides/slide6.xml><?xml version="1.0" encoding="utf-8"?>
+<file path=ppt/slides/slide7.xml><?xml version="1.0" encoding="utf-8"?>
 <p:sld xmlns:a="http://schemas.openxmlformats.org/drawingml/2006/main" xmlns:r="http://schemas.openxmlformats.org/officeDocument/2006/relationships" xmlns:p="http://schemas.openxmlformats.org/presentationml/2006/main">
   <p:cSld>
     <p:spTree>
@@ -4848,107 +5038,6 @@
 </p:sld>
 </file>
 
-<file path=ppt/slides/slide7.xml><?xml version="1.0" encoding="utf-8"?>
-<p:sld xmlns:a="http://schemas.openxmlformats.org/drawingml/2006/main" xmlns:r="http://schemas.openxmlformats.org/officeDocument/2006/relationships" xmlns:p="http://schemas.openxmlformats.org/presentationml/2006/main">
-  <p:cSld>
-    <p:spTree>
-      <p:nvGrpSpPr>
-        <p:cNvPr id="1" name=""/>
-        <p:cNvGrpSpPr/>
-        <p:nvPr/>
-      </p:nvGrpSpPr>
-      <p:grpSpPr>
-        <a:xfrm>
-          <a:off x="0" y="0"/>
-          <a:ext cx="0" cy="0"/>
-          <a:chOff x="0" y="0"/>
-          <a:chExt cx="0" cy="0"/>
-        </a:xfrm>
-      </p:grpSpPr>
-      <p:sp>
-        <p:nvSpPr>
-          <p:cNvPr id="2" name="Title 1">
-            <a:extLst>
-              <a:ext uri="{FF2B5EF4-FFF2-40B4-BE49-F238E27FC236}">
-                <a16:creationId xmlns:a16="http://schemas.microsoft.com/office/drawing/2014/main" id="{30B91488-E989-1ADC-6E5C-7E8B54C46DAC}"/>
-              </a:ext>
-            </a:extLst>
-          </p:cNvPr>
-          <p:cNvSpPr>
-            <a:spLocks noGrp="1"/>
-          </p:cNvSpPr>
-          <p:nvPr>
-            <p:ph type="title"/>
-          </p:nvPr>
-        </p:nvSpPr>
-        <p:spPr/>
-        <p:txBody>
-          <a:bodyPr/>
-          <a:lstStyle/>
-          <a:p>
-            <a:r>
-              <a:rPr lang="en-US" dirty="0"/>
-              <a:t>Random operating point simulation</a:t>
-            </a:r>
-          </a:p>
-        </p:txBody>
-      </p:sp>
-      <p:sp>
-        <p:nvSpPr>
-          <p:cNvPr id="3" name="Content Placeholder 2">
-            <a:extLst>
-              <a:ext uri="{FF2B5EF4-FFF2-40B4-BE49-F238E27FC236}">
-                <a16:creationId xmlns:a16="http://schemas.microsoft.com/office/drawing/2014/main" id="{604D0483-1AD2-1F58-C9C1-DE2F637D9CB3}"/>
-              </a:ext>
-            </a:extLst>
-          </p:cNvPr>
-          <p:cNvSpPr>
-            <a:spLocks noGrp="1"/>
-          </p:cNvSpPr>
-          <p:nvPr>
-            <p:ph idx="1"/>
-          </p:nvPr>
-        </p:nvSpPr>
-        <p:spPr/>
-        <p:txBody>
-          <a:bodyPr/>
-          <a:lstStyle/>
-          <a:p>
-            <a:r>
-              <a:rPr lang="en-US" dirty="0"/>
-              <a:t>24V battery pack at 63% SOC</a:t>
-            </a:r>
-          </a:p>
-          <a:p>
-            <a:r>
-              <a:rPr lang="en-US" dirty="0"/>
-              <a:t>8A charging current</a:t>
-            </a:r>
-          </a:p>
-          <a:p>
-            <a:r>
-              <a:rPr lang="en-US" dirty="0"/>
-              <a:t>Generator L-L peak output of 112V at 71 Hz</a:t>
-            </a:r>
-          </a:p>
-          <a:p>
-            <a:endParaRPr lang="en-US" dirty="0"/>
-          </a:p>
-        </p:txBody>
-      </p:sp>
-    </p:spTree>
-    <p:extLst>
-      <p:ext uri="{BB962C8B-B14F-4D97-AF65-F5344CB8AC3E}">
-        <p14:creationId xmlns:p14="http://schemas.microsoft.com/office/powerpoint/2010/main" val="1528692235"/>
-      </p:ext>
-    </p:extLst>
-  </p:cSld>
-  <p:clrMapOvr>
-    <a:masterClrMapping/>
-  </p:clrMapOvr>
-</p:sld>
-</file>
-
 <file path=ppt/slides/slide8.xml><?xml version="1.0" encoding="utf-8"?>
 <p:sld xmlns:a="http://schemas.openxmlformats.org/drawingml/2006/main" xmlns:r="http://schemas.openxmlformats.org/officeDocument/2006/relationships" xmlns:p="http://schemas.openxmlformats.org/presentationml/2006/main">
   <p:cSld>
@@ -4971,7 +5060,7 @@
           <p:cNvPr id="2" name="Title 1">
             <a:extLst>
               <a:ext uri="{FF2B5EF4-FFF2-40B4-BE49-F238E27FC236}">
-                <a16:creationId xmlns:a16="http://schemas.microsoft.com/office/drawing/2014/main" id="{1CEAFB25-DC3E-DFC0-BB18-8CD53A539353}"/>
+                <a16:creationId xmlns:a16="http://schemas.microsoft.com/office/drawing/2014/main" id="{30B91488-E989-1ADC-6E5C-7E8B54C46DAC}"/>
               </a:ext>
             </a:extLst>
           </p:cNvPr>
@@ -4989,47 +5078,58 @@
           <a:p>
             <a:r>
               <a:rPr lang="en-US" dirty="0"/>
-              <a:t>Rectifier output voltage (Vm1)</a:t>
-            </a:r>
-          </a:p>
-        </p:txBody>
-      </p:sp>
-      <p:pic>
-        <p:nvPicPr>
-          <p:cNvPr id="11" name="Content Placeholder 10">
+              <a:t>Random operating point simulation</a:t>
+            </a:r>
+          </a:p>
+        </p:txBody>
+      </p:sp>
+      <p:sp>
+        <p:nvSpPr>
+          <p:cNvPr id="3" name="Content Placeholder 2">
             <a:extLst>
               <a:ext uri="{FF2B5EF4-FFF2-40B4-BE49-F238E27FC236}">
-                <a16:creationId xmlns:a16="http://schemas.microsoft.com/office/drawing/2014/main" id="{3B8E734F-15C8-A1BC-3AEC-A9B3E2D06AD8}"/>
+                <a16:creationId xmlns:a16="http://schemas.microsoft.com/office/drawing/2014/main" id="{604D0483-1AD2-1F58-C9C1-DE2F637D9CB3}"/>
               </a:ext>
             </a:extLst>
           </p:cNvPr>
-          <p:cNvPicPr>
-            <a:picLocks noGrp="1" noChangeAspect="1"/>
-          </p:cNvPicPr>
+          <p:cNvSpPr>
+            <a:spLocks noGrp="1"/>
+          </p:cNvSpPr>
           <p:nvPr>
             <p:ph idx="1"/>
           </p:nvPr>
-        </p:nvPicPr>
-        <p:blipFill>
-          <a:blip r:embed="rId2"/>
-          <a:stretch>
-            <a:fillRect/>
-          </a:stretch>
-        </p:blipFill>
-        <p:spPr>
-          <a:xfrm>
-            <a:off x="2767376" y="1690688"/>
-            <a:ext cx="6657247" cy="4977309"/>
-          </a:xfrm>
-          <a:prstGeom prst="rect">
-            <a:avLst/>
-          </a:prstGeom>
-        </p:spPr>
-      </p:pic>
+        </p:nvSpPr>
+        <p:spPr/>
+        <p:txBody>
+          <a:bodyPr/>
+          <a:lstStyle/>
+          <a:p>
+            <a:r>
+              <a:rPr lang="en-US" dirty="0"/>
+              <a:t>24V battery pack at 63% SOC</a:t>
+            </a:r>
+          </a:p>
+          <a:p>
+            <a:r>
+              <a:rPr lang="en-US" dirty="0"/>
+              <a:t>8A charging current</a:t>
+            </a:r>
+          </a:p>
+          <a:p>
+            <a:r>
+              <a:rPr lang="en-US" dirty="0"/>
+              <a:t>Generator L-L peak output of 112V at 71 Hz</a:t>
+            </a:r>
+          </a:p>
+          <a:p>
+            <a:endParaRPr lang="en-US" dirty="0"/>
+          </a:p>
+        </p:txBody>
+      </p:sp>
     </p:spTree>
     <p:extLst>
       <p:ext uri="{BB962C8B-B14F-4D97-AF65-F5344CB8AC3E}">
-        <p14:creationId xmlns:p14="http://schemas.microsoft.com/office/powerpoint/2010/main" val="3797564447"/>
+        <p14:creationId xmlns:p14="http://schemas.microsoft.com/office/powerpoint/2010/main" val="1528692235"/>
       </p:ext>
     </p:extLst>
   </p:cSld>
@@ -5061,7 +5161,7 @@
           <p:cNvPr id="2" name="Title 1">
             <a:extLst>
               <a:ext uri="{FF2B5EF4-FFF2-40B4-BE49-F238E27FC236}">
-                <a16:creationId xmlns:a16="http://schemas.microsoft.com/office/drawing/2014/main" id="{585FF3C3-3119-816C-8D49-AF0BB9052B8B}"/>
+                <a16:creationId xmlns:a16="http://schemas.microsoft.com/office/drawing/2014/main" id="{1CEAFB25-DC3E-DFC0-BB18-8CD53A539353}"/>
               </a:ext>
             </a:extLst>
           </p:cNvPr>
@@ -5079,17 +5179,17 @@
           <a:p>
             <a:r>
               <a:rPr lang="en-US" dirty="0"/>
-              <a:t>Battery Voltage (Vm2)</a:t>
+              <a:t>Rectifier output voltage (Vm1)</a:t>
             </a:r>
           </a:p>
         </p:txBody>
       </p:sp>
       <p:pic>
         <p:nvPicPr>
-          <p:cNvPr id="12" name="Content Placeholder 11">
+          <p:cNvPr id="11" name="Content Placeholder 10">
             <a:extLst>
               <a:ext uri="{FF2B5EF4-FFF2-40B4-BE49-F238E27FC236}">
-                <a16:creationId xmlns:a16="http://schemas.microsoft.com/office/drawing/2014/main" id="{1CCC0623-98C2-6C3E-CFA3-E122F1F3B714}"/>
+                <a16:creationId xmlns:a16="http://schemas.microsoft.com/office/drawing/2014/main" id="{3B8E734F-15C8-A1BC-3AEC-A9B3E2D06AD8}"/>
               </a:ext>
             </a:extLst>
           </p:cNvPr>
@@ -5108,8 +5208,8 @@
         </p:blipFill>
         <p:spPr>
           <a:xfrm>
-            <a:off x="2661992" y="1690688"/>
-            <a:ext cx="6868015" cy="5108568"/>
+            <a:off x="2767376" y="1690688"/>
+            <a:ext cx="6657247" cy="4977309"/>
           </a:xfrm>
           <a:prstGeom prst="rect">
             <a:avLst/>
@@ -5119,7 +5219,7 @@
     </p:spTree>
     <p:extLst>
       <p:ext uri="{BB962C8B-B14F-4D97-AF65-F5344CB8AC3E}">
-        <p14:creationId xmlns:p14="http://schemas.microsoft.com/office/powerpoint/2010/main" val="279167961"/>
+        <p14:creationId xmlns:p14="http://schemas.microsoft.com/office/powerpoint/2010/main" val="3797564447"/>
       </p:ext>
     </p:extLst>
   </p:cSld>
@@ -5706,23 +5806,6 @@
 </file>
 
 <file path=customXml/item1.xml><?xml version="1.0" encoding="utf-8"?>
-<p:properties xmlns:p="http://schemas.microsoft.com/office/2006/metadata/properties" xmlns:xsi="http://www.w3.org/2001/XMLSchema-instance" xmlns:pc="http://schemas.microsoft.com/office/infopath/2007/PartnerControls">
-  <documentManagement>
-    <_activity xmlns="77b6129a-f613-4ff9-b238-21504ab3c311" xsi:nil="true"/>
-  </documentManagement>
-</p:properties>
-</file>
-
-<file path=customXml/item2.xml><?xml version="1.0" encoding="utf-8"?>
-<?mso-contentType ?>
-<FormTemplates xmlns="http://schemas.microsoft.com/sharepoint/v3/contenttype/forms">
-  <Display>DocumentLibraryForm</Display>
-  <Edit>DocumentLibraryForm</Edit>
-  <New>DocumentLibraryForm</New>
-</FormTemplates>
-</file>
-
-<file path=customXml/item3.xml><?xml version="1.0" encoding="utf-8"?>
 <ct:contentTypeSchema xmlns:ct="http://schemas.microsoft.com/office/2006/metadata/contentType" xmlns:ma="http://schemas.microsoft.com/office/2006/metadata/properties/metaAttributes" ct:_="" ma:_="" ma:contentTypeName="Document" ma:contentTypeID="0x0101009660838691862E40BA8A9FCF4672D404" ma:contentTypeVersion="8" ma:contentTypeDescription="Create a new document." ma:contentTypeScope="" ma:versionID="57f0f8c66996a8cfd8079b5f5cbc1044">
   <xsd:schema xmlns:xsd="http://www.w3.org/2001/XMLSchema" xmlns:xs="http://www.w3.org/2001/XMLSchema" xmlns:p="http://schemas.microsoft.com/office/2006/metadata/properties" xmlns:ns3="77b6129a-f613-4ff9-b238-21504ab3c311" xmlns:ns4="e5775723-78a2-49b3-980c-6ad0b4b03e58" targetNamespace="http://schemas.microsoft.com/office/2006/metadata/properties" ma:root="true" ma:fieldsID="97be24bc9c367c471a14e5d43da4af43" ns3:_="" ns4:_="">
     <xsd:import namespace="77b6129a-f613-4ff9-b238-21504ab3c311"/>
@@ -5911,32 +5994,24 @@
 </ct:contentTypeSchema>
 </file>
 
-<file path=customXml/itemProps1.xml><?xml version="1.0" encoding="utf-8"?>
-<ds:datastoreItem xmlns:ds="http://schemas.openxmlformats.org/officeDocument/2006/customXml" ds:itemID="{18625800-C513-4732-B46D-574F44528941}">
-  <ds:schemaRefs>
-    <ds:schemaRef ds:uri="http://www.w3.org/XML/1998/namespace"/>
-    <ds:schemaRef ds:uri="http://schemas.microsoft.com/office/infopath/2007/PartnerControls"/>
-    <ds:schemaRef ds:uri="http://purl.org/dc/elements/1.1/"/>
-    <ds:schemaRef ds:uri="http://purl.org/dc/terms/"/>
-    <ds:schemaRef ds:uri="e5775723-78a2-49b3-980c-6ad0b4b03e58"/>
-    <ds:schemaRef ds:uri="http://schemas.microsoft.com/office/2006/documentManagement/types"/>
-    <ds:schemaRef ds:uri="http://purl.org/dc/dcmitype/"/>
-    <ds:schemaRef ds:uri="http://schemas.openxmlformats.org/package/2006/metadata/core-properties"/>
-    <ds:schemaRef ds:uri="77b6129a-f613-4ff9-b238-21504ab3c311"/>
-    <ds:schemaRef ds:uri="http://schemas.microsoft.com/office/2006/metadata/properties"/>
-  </ds:schemaRefs>
-</ds:datastoreItem>
+<file path=customXml/item2.xml><?xml version="1.0" encoding="utf-8"?>
+<?mso-contentType ?>
+<FormTemplates xmlns="http://schemas.microsoft.com/sharepoint/v3/contenttype/forms">
+  <Display>DocumentLibraryForm</Display>
+  <Edit>DocumentLibraryForm</Edit>
+  <New>DocumentLibraryForm</New>
+</FormTemplates>
 </file>
 
-<file path=customXml/itemProps2.xml><?xml version="1.0" encoding="utf-8"?>
-<ds:datastoreItem xmlns:ds="http://schemas.openxmlformats.org/officeDocument/2006/customXml" ds:itemID="{E9E8A94E-DDB9-453A-96FC-9DCB3AD29B79}">
-  <ds:schemaRefs>
-    <ds:schemaRef ds:uri="http://schemas.microsoft.com/sharepoint/v3/contenttype/forms"/>
-  </ds:schemaRefs>
-</ds:datastoreItem>
+<file path=customXml/item3.xml><?xml version="1.0" encoding="utf-8"?>
+<p:properties xmlns:p="http://schemas.microsoft.com/office/2006/metadata/properties" xmlns:xsi="http://www.w3.org/2001/XMLSchema-instance" xmlns:pc="http://schemas.microsoft.com/office/infopath/2007/PartnerControls">
+  <documentManagement>
+    <_activity xmlns="77b6129a-f613-4ff9-b238-21504ab3c311" xsi:nil="true"/>
+  </documentManagement>
+</p:properties>
 </file>
 
-<file path=customXml/itemProps3.xml><?xml version="1.0" encoding="utf-8"?>
+<file path=customXml/itemProps1.xml><?xml version="1.0" encoding="utf-8"?>
 <ds:datastoreItem xmlns:ds="http://schemas.openxmlformats.org/officeDocument/2006/customXml" ds:itemID="{FA4A2419-B775-4A5A-93DA-C08C59AA0225}">
   <ds:schemaRefs>
     <ds:schemaRef ds:uri="http://schemas.microsoft.com/office/2006/metadata/contentType"/>
@@ -5953,4 +6028,29 @@
     <ds:schemaRef ds:uri="http://schemas.microsoft.com/internal/obd"/>
   </ds:schemaRefs>
 </ds:datastoreItem>
+</file>
+
+<file path=customXml/itemProps2.xml><?xml version="1.0" encoding="utf-8"?>
+<ds:datastoreItem xmlns:ds="http://schemas.openxmlformats.org/officeDocument/2006/customXml" ds:itemID="{E9E8A94E-DDB9-453A-96FC-9DCB3AD29B79}">
+  <ds:schemaRefs>
+    <ds:schemaRef ds:uri="http://schemas.microsoft.com/sharepoint/v3/contenttype/forms"/>
+  </ds:schemaRefs>
+</ds:datastoreItem>
+</file>
+
+<file path=customXml/itemProps3.xml><?xml version="1.0" encoding="utf-8"?>
+<ds:datastoreItem xmlns:ds="http://schemas.openxmlformats.org/officeDocument/2006/customXml" ds:itemID="{18625800-C513-4732-B46D-574F44528941}">
+  <ds:schemaRefs>
+    <ds:schemaRef ds:uri="http://www.w3.org/XML/1998/namespace"/>
+    <ds:schemaRef ds:uri="http://schemas.microsoft.com/office/infopath/2007/PartnerControls"/>
+    <ds:schemaRef ds:uri="http://purl.org/dc/elements/1.1/"/>
+    <ds:schemaRef ds:uri="http://purl.org/dc/terms/"/>
+    <ds:schemaRef ds:uri="e5775723-78a2-49b3-980c-6ad0b4b03e58"/>
+    <ds:schemaRef ds:uri="http://schemas.microsoft.com/office/2006/documentManagement/types"/>
+    <ds:schemaRef ds:uri="http://purl.org/dc/dcmitype/"/>
+    <ds:schemaRef ds:uri="http://schemas.openxmlformats.org/package/2006/metadata/core-properties"/>
+    <ds:schemaRef ds:uri="77b6129a-f613-4ff9-b238-21504ab3c311"/>
+    <ds:schemaRef ds:uri="http://schemas.microsoft.com/office/2006/metadata/properties"/>
+  </ds:schemaRefs>
+</ds:datastoreItem>
 </file>